--- a/docs/content/glm_logistic_regression/glm_logistic_regression_lecture.pptx
+++ b/docs/content/glm_logistic_regression/glm_logistic_regression_lecture.pptx
@@ -3427,7 +3427,7 @@
             </a:pPr>
             <a:r>
               <a:rPr/>
-              <a:t>GLM with Gaussian (Normal) Distribution: Setup</a:t>
+              <a:t>Gaussian GLM — Building the Size Categories</a:t>
             </a:r>
           </a:p>
         </p:txBody>
@@ -4163,7 +4163,27 @@
             </a:pPr>
             <a:r>
               <a:rPr/>
-              <a:t>GLM with Gaussian (Normal) Distribution: Setup</a:t>
+              <a:t>Gaussian GLM — Fitting </a:t>
+            </a:r>
+            <a:r>
+              <a:rPr>
+                <a:latin typeface="Courier"/>
+              </a:rPr>
+              <a:t>lm()</a:t>
+            </a:r>
+            <a:r>
+              <a:rPr/>
+              <a:t> and </a:t>
+            </a:r>
+            <a:r>
+              <a:rPr>
+                <a:latin typeface="Courier"/>
+              </a:rPr>
+              <a:t>glm()</a:t>
+            </a:r>
+            <a:r>
+              <a:rPr/>
+              <a:t> Side by Side</a:t>
             </a:r>
           </a:p>
         </p:txBody>
@@ -4356,7 +4376,7 @@
             </a:pPr>
             <a:r>
               <a:rPr/>
-              <a:t>GLM with Gaussian (Normal) Distribution: Setup</a:t>
+              <a:t>Gaussian GLM — Reading the Output: Deviance and Dispersion</a:t>
             </a:r>
           </a:p>
         </p:txBody>
@@ -4982,7 +5002,7 @@
             </a:pPr>
             <a:r>
               <a:rPr/>
-              <a:t>GLM with Poisson Distribution: Setup</a:t>
+              <a:t>Poisson GLM — Why Counts Need a Different Distribution</a:t>
             </a:r>
           </a:p>
         </p:txBody>
@@ -5729,7 +5749,7 @@
             </a:pPr>
             <a:r>
               <a:rPr/>
-              <a:t>GLM with Poisson Distribution: Setup</a:t>
+              <a:t>Poisson GLM — Fitting the Model</a:t>
             </a:r>
           </a:p>
         </p:txBody>
@@ -6047,7 +6067,7 @@
             </a:pPr>
             <a:r>
               <a:rPr/>
-              <a:t>GLM with Poisson Distribution: Setup</a:t>
+              <a:t>Poisson GLM — Checking Dispersion</a:t>
             </a:r>
           </a:p>
         </p:txBody>
@@ -6630,7 +6650,7 @@
             </a:pPr>
             <a:r>
               <a:rPr/>
-              <a:t>GLM with Poisson Distribution: Setup</a:t>
+              <a:t>Poisson GLM — Estimated Marginal Means on the Count Scale</a:t>
             </a:r>
           </a:p>
         </p:txBody>
@@ -8383,7 +8403,7 @@
             </a:pPr>
             <a:r>
               <a:rPr/>
-              <a:t>Example: Lizard Presence on Islands</a:t>
+              <a:t>Logistic Regression — The Lizard Island Data</a:t>
             </a:r>
           </a:p>
         </p:txBody>
@@ -8473,7 +8493,7 @@
             </a:pPr>
             <a:r>
               <a:rPr/>
-              <a:t>Example: Lizard Presence on Islands</a:t>
+              <a:t>Logistic Regression — Fitting the Model</a:t>
             </a:r>
           </a:p>
         </p:txBody>
@@ -11251,7 +11271,7 @@
             </a:pPr>
             <a:r>
               <a:rPr/>
-              <a:t>Scientific Write-Up Example</a:t>
+              <a:t>Scientific Write-Up — Results</a:t>
             </a:r>
           </a:p>
         </p:txBody>
@@ -11276,7 +11296,7 @@
             </a:pPr>
             <a:r>
               <a:rPr sz="2000" b="1"/>
-              <a:t>Scientific Write-Up Example</a:t>
+              <a:t>Results</a:t>
             </a:r>
           </a:p>
           <a:p>
@@ -11294,7 +11314,7 @@
             </a:pPr>
             <a:r>
               <a:rPr sz="2000"/>
-              <a:t>The presence of native rodents in canyon fragments was modeled using multiple logistic regression with three predictors: distance to nearest source canyon, years since isolation, and percentage of shrub cover. The model was statistically significant (χ² = 12.63, df = 3, p = 0.005) and explained 38.7% of the variation in rodent presence (McFadden’s R² = 0.387).</a:t>
+              <a:t>The presence of native rodents in 25 canyon fragments was modeled using multiple logistic regression with three predictors: distance to nearest source canyon, years since isolation, and percentage of shrub cover. Taken together the three predictors improved on the null model (likelihood-ratio χ² = 18.28, df = 3, p &lt; 0.001; McFadden’s R² = 0.66).</a:t>
             </a:r>
           </a:p>
           <a:p>
@@ -11302,8 +11322,12 @@
               <a:buNone/>
             </a:pPr>
             <a:r>
+              <a:rPr sz="2000" b="1"/>
+              <a:t>No individual predictor reached significance at α = 0.05.</a:t>
+            </a:r>
+            <a:r>
               <a:rPr sz="2000"/>
-              <a:t>Among the predictors, only shrub cover had a statistically significant effect on rodent presence (β = 0.091, SE = 0.041, p = 0.026). The odds ratio for shrub cover was 1.095 (95% CI: 1.011-1.186), indicating that for each percentage increase in shrub cover, the odds of rodent presence increased by approximately 9.5%. Neither distance to source canyon (β = 0.0002, p = 0.690) nor years since isolation (β = 0.022, p = 0.566) showed significant relationships with rodent presence.</a:t>
+              <a:t> Shrub cover showed the strongest effect (β = 0.193, SE = 0.116, p = 0.096; odds ratio 1.21, 95% CI 1.06–1.79), suggesting that each additional percentage point of shrub cover multiplies the odds of rodent presence by roughly 1.2 — but the confidence interval is wide and the coefficient is not distinguishable from zero at conventional levels. Neither distance to source canyon (β = 0.0021, p = 0.229) nor years since isolation (β = 0.069, p = 0.249) approached significance.</a:t>
             </a:r>
           </a:p>
           <a:p>
@@ -11312,7 +11336,7 @@
             </a:pPr>
             <a:r>
               <a:rPr sz="2000"/>
-              <a:t>The model correctly classified 76% of the fragments, with a sensitivity of 0.77 and a specificity of 0.75. Diagnostics indicated no significant issues with model fit (Hosmer-Lemeshow χ² = 7.31, df = 8, p = 0.504).</a:t>
+              <a:t>The model correctly classified 88% of the fragments (sensitivity 0.90, specificity 0.83), and showed no evidence of poor fit (Hosmer-Lemeshow χ² = 0.95, df = 6, p = 0.99).</a:t>
             </a:r>
           </a:p>
         </p:txBody>
@@ -11514,7 +11538,7 @@
             </a:pPr>
             <a:r>
               <a:rPr/>
-              <a:t>Scientific Write-Up Example</a:t>
+              <a:t>Scientific Write-Up — Discussion</a:t>
             </a:r>
           </a:p>
         </p:txBody>
@@ -11539,7 +11563,7 @@
             </a:pPr>
             <a:r>
               <a:rPr sz="2000" b="1"/>
-              <a:t>Scientific Write-Up Example</a:t>
+              <a:t>Discussion</a:t>
             </a:r>
           </a:p>
           <a:p>
@@ -11557,7 +11581,23 @@
             </a:pPr>
             <a:r>
               <a:rPr sz="2000"/>
-              <a:t>Our findings suggest that vegetation structure, as measured by shrub cover, is a strong predictor of native rodent presence in canyon fragments. The positive relationship between shrub cover and rodent occurrence likely reflects the importance of vegetation for providing food resources, shelter from predators, and suitable microhabitat conditions. Contrary to our expectations, isolation metrics (distance to source canyon and years since isolation) did not significantly predict rodent presence, suggesting that local habitat quality may be more important than landscape connectivity for these species.</a:t>
+              <a:t>Our findings are </a:t>
+            </a:r>
+            <a:r>
+              <a:rPr sz="2000" i="1"/>
+              <a:t>suggestive</a:t>
+            </a:r>
+            <a:r>
+              <a:rPr sz="2000"/>
+              <a:t> that vegetation structure, as measured by shrub cover, is associated with native rodent presence in canyon fragments — the effect is in the expected direction and is the largest of the three — but with only 25 fragments the estimate is too imprecise to call significant (p = 0.096). The positive direction is consistent with vegetation providing food, shelter from predators, and suitable microhabitat. Isolation metrics (distance to source canyon and years since isolation) showed no detectable relationship, though the same sample-size caveat applies: </a:t>
+            </a:r>
+            <a:r>
+              <a:rPr sz="2000" b="1"/>
+              <a:t>failing to detect an effect is not the same as showing there is none.</a:t>
+            </a:r>
+            <a:r>
+              <a:rPr sz="2000"/>
+              <a:t> A larger set of fragments would be needed to separate these possibilities.</a:t>
             </a:r>
           </a:p>
         </p:txBody>
@@ -12092,7 +12132,7 @@
             </a:pPr>
             <a:r>
               <a:rPr/>
-              <a:t>Summary and Conclusions</a:t>
+              <a:t>Summary — What a GLM Gives You</a:t>
             </a:r>
           </a:p>
         </p:txBody>
@@ -12263,7 +12303,7 @@
             </a:pPr>
             <a:r>
               <a:rPr/>
-              <a:t>Summary and Conclusions</a:t>
+              <a:t>Summary — Choosing a Distribution and Link</a:t>
             </a:r>
           </a:p>
         </p:txBody>
@@ -14514,7 +14554,7 @@
             </a:pPr>
             <a:r>
               <a:rPr/>
-              <a:t>GLM with Gaussian (Normal) Distribution: Setup</a:t>
+              <a:t>Gaussian GLM — The Galápagos Island Data</a:t>
             </a:r>
           </a:p>
         </p:txBody>
